--- a/PPT.pptx
+++ b/PPT.pptx
@@ -23,14 +23,16 @@
     <p:sldId id="324" r:id="rId16"/>
     <p:sldId id="314" r:id="rId17"/>
     <p:sldId id="301" r:id="rId18"/>
-    <p:sldId id="315" r:id="rId19"/>
-    <p:sldId id="304" r:id="rId20"/>
-    <p:sldId id="308" r:id="rId21"/>
+    <p:sldId id="327" r:id="rId19"/>
+    <p:sldId id="315" r:id="rId20"/>
+    <p:sldId id="304" r:id="rId21"/>
+    <p:sldId id="326" r:id="rId22"/>
+    <p:sldId id="308" r:id="rId23"/>
   </p:sldIdLst>
   <p:sldSz cx="12192000" cy="6858000"/>
   <p:notesSz cx="6858000" cy="9144000"/>
   <p:custDataLst>
-    <p:tags r:id="rId25"/>
+    <p:tags r:id="rId27"/>
   </p:custDataLst>
   <p:defaultTextStyle>
     <a:defPPr>
@@ -946,6 +948,162 @@
 </file>
 
 <file path=ppt/notesSlides/notesSlide15.xml><?xml version="1.0" encoding="utf-8"?>
+<p:notes xmlns:a="http://schemas.openxmlformats.org/drawingml/2006/main" xmlns:r="http://schemas.openxmlformats.org/officeDocument/2006/relationships" xmlns:p="http://schemas.openxmlformats.org/presentationml/2006/main">
+  <p:cSld>
+    <p:spTree>
+      <p:nvGrpSpPr>
+        <p:cNvPr id="1" name=""/>
+        <p:cNvGrpSpPr/>
+        <p:nvPr/>
+      </p:nvGrpSpPr>
+      <p:grpSpPr>
+        <a:xfrm>
+          <a:off x="0" y="0"/>
+          <a:ext cx="0" cy="0"/>
+          <a:chOff x="0" y="0"/>
+          <a:chExt cx="0" cy="0"/>
+        </a:xfrm>
+      </p:grpSpPr>
+      <p:sp>
+        <p:nvSpPr>
+          <p:cNvPr id="2" name="幻灯片图像占位符 1"/>
+          <p:cNvSpPr>
+            <a:spLocks noGrp="1" noRot="1" noChangeAspect="1"/>
+          </p:cNvSpPr>
+          <p:nvPr>
+            <p:ph type="sldImg"/>
+          </p:nvPr>
+        </p:nvSpPr>
+        <p:spPr/>
+      </p:sp>
+      <p:sp>
+        <p:nvSpPr>
+          <p:cNvPr id="3" name="备注占位符 2"/>
+          <p:cNvSpPr>
+            <a:spLocks noGrp="1"/>
+          </p:cNvSpPr>
+          <p:nvPr>
+            <p:ph type="body" idx="1"/>
+          </p:nvPr>
+        </p:nvSpPr>
+        <p:spPr/>
+        <p:txBody>
+          <a:bodyPr/>
+          <a:lstStyle/>
+          <a:p>
+            <a:endParaRPr lang="zh-CN" altLang="en-US" dirty="0"/>
+          </a:p>
+        </p:txBody>
+      </p:sp>
+      <p:sp>
+        <p:nvSpPr>
+          <p:cNvPr id="4" name="灯片编号占位符 3"/>
+          <p:cNvSpPr>
+            <a:spLocks noGrp="1"/>
+          </p:cNvSpPr>
+          <p:nvPr>
+            <p:ph type="sldNum" sz="quarter" idx="5"/>
+          </p:nvPr>
+        </p:nvSpPr>
+        <p:spPr/>
+        <p:txBody>
+          <a:bodyPr/>
+          <a:lstStyle/>
+          <a:p>
+            <a:fld id="{634A660F-C86D-4CF9-B5A6-5C1DF3D8659B}" type="slidenum">
+              <a:rPr lang="zh-CN" altLang="en-US" smtClean="0"/>
+            </a:fld>
+            <a:endParaRPr lang="zh-CN" altLang="en-US"/>
+          </a:p>
+        </p:txBody>
+      </p:sp>
+    </p:spTree>
+  </p:cSld>
+  <p:clrMapOvr>
+    <a:masterClrMapping/>
+  </p:clrMapOvr>
+</p:notes>
+</file>
+
+<file path=ppt/notesSlides/notesSlide16.xml><?xml version="1.0" encoding="utf-8"?>
+<p:notes xmlns:a="http://schemas.openxmlformats.org/drawingml/2006/main" xmlns:r="http://schemas.openxmlformats.org/officeDocument/2006/relationships" xmlns:p="http://schemas.openxmlformats.org/presentationml/2006/main">
+  <p:cSld>
+    <p:spTree>
+      <p:nvGrpSpPr>
+        <p:cNvPr id="1" name=""/>
+        <p:cNvGrpSpPr/>
+        <p:nvPr/>
+      </p:nvGrpSpPr>
+      <p:grpSpPr>
+        <a:xfrm>
+          <a:off x="0" y="0"/>
+          <a:ext cx="0" cy="0"/>
+          <a:chOff x="0" y="0"/>
+          <a:chExt cx="0" cy="0"/>
+        </a:xfrm>
+      </p:grpSpPr>
+      <p:sp>
+        <p:nvSpPr>
+          <p:cNvPr id="2" name="幻灯片图像占位符 1"/>
+          <p:cNvSpPr>
+            <a:spLocks noGrp="1" noRot="1" noChangeAspect="1"/>
+          </p:cNvSpPr>
+          <p:nvPr>
+            <p:ph type="sldImg"/>
+          </p:nvPr>
+        </p:nvSpPr>
+        <p:spPr/>
+      </p:sp>
+      <p:sp>
+        <p:nvSpPr>
+          <p:cNvPr id="3" name="备注占位符 2"/>
+          <p:cNvSpPr>
+            <a:spLocks noGrp="1"/>
+          </p:cNvSpPr>
+          <p:nvPr>
+            <p:ph type="body" idx="1"/>
+          </p:nvPr>
+        </p:nvSpPr>
+        <p:spPr/>
+        <p:txBody>
+          <a:bodyPr/>
+          <a:lstStyle/>
+          <a:p>
+            <a:endParaRPr lang="zh-CN" altLang="en-US" dirty="0"/>
+          </a:p>
+        </p:txBody>
+      </p:sp>
+      <p:sp>
+        <p:nvSpPr>
+          <p:cNvPr id="4" name="灯片编号占位符 3"/>
+          <p:cNvSpPr>
+            <a:spLocks noGrp="1"/>
+          </p:cNvSpPr>
+          <p:nvPr>
+            <p:ph type="sldNum" sz="quarter" idx="5"/>
+          </p:nvPr>
+        </p:nvSpPr>
+        <p:spPr/>
+        <p:txBody>
+          <a:bodyPr/>
+          <a:lstStyle/>
+          <a:p>
+            <a:fld id="{634A660F-C86D-4CF9-B5A6-5C1DF3D8659B}" type="slidenum">
+              <a:rPr lang="zh-CN" altLang="en-US" smtClean="0"/>
+            </a:fld>
+            <a:endParaRPr lang="zh-CN" altLang="en-US"/>
+          </a:p>
+        </p:txBody>
+      </p:sp>
+    </p:spTree>
+  </p:cSld>
+  <p:clrMapOvr>
+    <a:masterClrMapping/>
+  </p:clrMapOvr>
+</p:notes>
+</file>
+
+<file path=ppt/notesSlides/notesSlide17.xml><?xml version="1.0" encoding="utf-8"?>
 <p:notes xmlns:a="http://schemas.openxmlformats.org/drawingml/2006/main" xmlns:r="http://schemas.openxmlformats.org/officeDocument/2006/relationships" xmlns:p="http://schemas.openxmlformats.org/presentationml/2006/main">
   <p:cSld>
     <p:spTree>
@@ -11959,6 +12117,416 @@
       </p:grpSpPr>
       <p:sp>
         <p:nvSpPr>
+          <p:cNvPr id="3" name="矩形 2"/>
+          <p:cNvSpPr/>
+          <p:nvPr/>
+        </p:nvSpPr>
+        <p:spPr>
+          <a:xfrm>
+            <a:off x="-1" y="4072421"/>
+            <a:ext cx="2234877" cy="616282"/>
+          </a:xfrm>
+          <a:prstGeom prst="rect">
+            <a:avLst/>
+          </a:prstGeom>
+          <a:ln>
+            <a:noFill/>
+          </a:ln>
+        </p:spPr>
+        <p:style>
+          <a:lnRef idx="2">
+            <a:schemeClr val="accent1">
+              <a:shade val="15000"/>
+            </a:schemeClr>
+          </a:lnRef>
+          <a:fillRef idx="1">
+            <a:schemeClr val="accent1"/>
+          </a:fillRef>
+          <a:effectRef idx="0">
+            <a:schemeClr val="accent1"/>
+          </a:effectRef>
+          <a:fontRef idx="minor">
+            <a:schemeClr val="lt1"/>
+          </a:fontRef>
+        </p:style>
+        <p:txBody>
+          <a:bodyPr rtlCol="0" anchor="ctr"/>
+          <a:lstStyle/>
+          <a:p>
+            <a:pPr algn="ctr"/>
+            <a:endParaRPr lang="zh-CN" altLang="en-US"/>
+          </a:p>
+        </p:txBody>
+      </p:sp>
+      <p:sp>
+        <p:nvSpPr>
+          <p:cNvPr id="175" name="文本框 174"/>
+          <p:cNvSpPr txBox="1"/>
+          <p:nvPr/>
+        </p:nvSpPr>
+        <p:spPr>
+          <a:xfrm>
+            <a:off x="406555" y="3038556"/>
+            <a:ext cx="1421765" cy="398780"/>
+          </a:xfrm>
+          <a:prstGeom prst="rect">
+            <a:avLst/>
+          </a:prstGeom>
+          <a:noFill/>
+        </p:spPr>
+        <p:txBody>
+          <a:bodyPr wrap="none" rtlCol="0">
+            <a:spAutoFit/>
+          </a:bodyPr>
+          <a:lstStyle/>
+          <a:p>
+            <a:pPr algn="ctr"/>
+            <a:r>
+              <a:rPr lang="en-US" altLang="zh-CN" sz="2000" b="1" dirty="0">
+                <a:solidFill>
+                  <a:schemeClr val="bg1">
+                    <a:lumMod val="65000"/>
+                  </a:schemeClr>
+                </a:solidFill>
+                <a:latin typeface="+mj-ea"/>
+                <a:ea typeface="+mj-ea"/>
+              </a:rPr>
+              <a:t>Functions</a:t>
+            </a:r>
+            <a:endParaRPr lang="en-US" altLang="zh-CN" sz="2000" b="1" dirty="0">
+              <a:solidFill>
+                <a:schemeClr val="bg1">
+                  <a:lumMod val="65000"/>
+                </a:schemeClr>
+              </a:solidFill>
+              <a:latin typeface="+mj-ea"/>
+              <a:ea typeface="+mj-ea"/>
+            </a:endParaRPr>
+          </a:p>
+        </p:txBody>
+      </p:sp>
+      <p:sp>
+        <p:nvSpPr>
+          <p:cNvPr id="181" name="文本框 180"/>
+          <p:cNvSpPr txBox="1"/>
+          <p:nvPr/>
+        </p:nvSpPr>
+        <p:spPr>
+          <a:xfrm>
+            <a:off x="361152" y="4181335"/>
+            <a:ext cx="1512570" cy="398780"/>
+          </a:xfrm>
+          <a:prstGeom prst="rect">
+            <a:avLst/>
+          </a:prstGeom>
+          <a:noFill/>
+        </p:spPr>
+        <p:txBody>
+          <a:bodyPr wrap="none" rtlCol="0">
+            <a:spAutoFit/>
+          </a:bodyPr>
+          <a:lstStyle/>
+          <a:p>
+            <a:pPr algn="ctr"/>
+            <a:r>
+              <a:rPr lang="en-US" altLang="zh-CN" sz="2000" b="1" dirty="0">
+                <a:solidFill>
+                  <a:schemeClr val="bg1">
+                    <a:lumMod val="95000"/>
+                  </a:schemeClr>
+                </a:solidFill>
+                <a:latin typeface="+mj-ea"/>
+                <a:ea typeface="+mj-ea"/>
+                <a:sym typeface="+mn-ea"/>
+              </a:rPr>
+              <a:t>Highlights</a:t>
+            </a:r>
+            <a:endParaRPr lang="en-US" altLang="zh-CN" sz="2000" b="1" dirty="0">
+              <a:solidFill>
+                <a:schemeClr val="bg1">
+                  <a:lumMod val="95000"/>
+                </a:schemeClr>
+              </a:solidFill>
+              <a:latin typeface="+mj-ea"/>
+              <a:ea typeface="+mj-ea"/>
+              <a:sym typeface="+mn-ea"/>
+            </a:endParaRPr>
+          </a:p>
+        </p:txBody>
+      </p:sp>
+      <p:sp>
+        <p:nvSpPr>
+          <p:cNvPr id="187" name="文本框 186"/>
+          <p:cNvSpPr txBox="1"/>
+          <p:nvPr/>
+        </p:nvSpPr>
+        <p:spPr>
+          <a:xfrm>
+            <a:off x="129377" y="5324113"/>
+            <a:ext cx="1976120" cy="398780"/>
+          </a:xfrm>
+          <a:prstGeom prst="rect">
+            <a:avLst/>
+          </a:prstGeom>
+          <a:noFill/>
+        </p:spPr>
+        <p:txBody>
+          <a:bodyPr wrap="none" rtlCol="0">
+            <a:spAutoFit/>
+          </a:bodyPr>
+          <a:lstStyle/>
+          <a:p>
+            <a:pPr algn="ctr"/>
+            <a:r>
+              <a:rPr lang="en-US" altLang="zh-CN" sz="2000" b="1" dirty="0">
+                <a:solidFill>
+                  <a:schemeClr val="bg1">
+                    <a:lumMod val="65000"/>
+                  </a:schemeClr>
+                </a:solidFill>
+                <a:latin typeface="+mj-ea"/>
+                <a:ea typeface="+mj-ea"/>
+                <a:sym typeface="+mn-ea"/>
+              </a:rPr>
+              <a:t>Achievements</a:t>
+            </a:r>
+            <a:endParaRPr lang="en-US" altLang="zh-CN" sz="2000" b="1" dirty="0">
+              <a:solidFill>
+                <a:schemeClr val="bg1">
+                  <a:lumMod val="65000"/>
+                </a:schemeClr>
+              </a:solidFill>
+              <a:latin typeface="+mj-ea"/>
+              <a:ea typeface="+mj-ea"/>
+            </a:endParaRPr>
+          </a:p>
+        </p:txBody>
+      </p:sp>
+      <p:sp>
+        <p:nvSpPr>
+          <p:cNvPr id="123" name="文本框 122"/>
+          <p:cNvSpPr txBox="1"/>
+          <p:nvPr/>
+        </p:nvSpPr>
+        <p:spPr>
+          <a:xfrm>
+            <a:off x="223357" y="1895777"/>
+            <a:ext cx="1788160" cy="398780"/>
+          </a:xfrm>
+          <a:prstGeom prst="rect">
+            <a:avLst/>
+          </a:prstGeom>
+          <a:noFill/>
+        </p:spPr>
+        <p:txBody>
+          <a:bodyPr wrap="none" rtlCol="0">
+            <a:spAutoFit/>
+          </a:bodyPr>
+          <a:lstStyle/>
+          <a:p>
+            <a:pPr algn="ctr"/>
+            <a:r>
+              <a:rPr lang="en-US" altLang="zh-CN" sz="2000" b="1" dirty="0">
+                <a:solidFill>
+                  <a:schemeClr val="bg1">
+                    <a:lumMod val="65000"/>
+                  </a:schemeClr>
+                </a:solidFill>
+                <a:latin typeface="+mj-ea"/>
+                <a:ea typeface="+mj-ea"/>
+              </a:rPr>
+              <a:t>Introduction</a:t>
+            </a:r>
+            <a:endParaRPr lang="en-US" altLang="zh-CN" sz="2000" b="1" dirty="0">
+              <a:solidFill>
+                <a:schemeClr val="bg1">
+                  <a:lumMod val="65000"/>
+                </a:schemeClr>
+              </a:solidFill>
+              <a:latin typeface="+mj-ea"/>
+              <a:ea typeface="+mj-ea"/>
+            </a:endParaRPr>
+          </a:p>
+        </p:txBody>
+      </p:sp>
+      <p:sp>
+        <p:nvSpPr>
+          <p:cNvPr id="7" name="文本框 6"/>
+          <p:cNvSpPr txBox="1"/>
+          <p:nvPr/>
+        </p:nvSpPr>
+        <p:spPr>
+          <a:xfrm>
+            <a:off x="2677160" y="368300"/>
+            <a:ext cx="5942330" cy="521970"/>
+          </a:xfrm>
+          <a:prstGeom prst="rect">
+            <a:avLst/>
+          </a:prstGeom>
+          <a:noFill/>
+        </p:spPr>
+        <p:txBody>
+          <a:bodyPr wrap="square" rtlCol="0">
+            <a:spAutoFit/>
+          </a:bodyPr>
+          <a:lstStyle/>
+          <a:p>
+            <a:pPr algn="l"/>
+            <a:r>
+              <a:rPr lang="en-US" altLang="zh-CN" sz="2800" b="1" dirty="0">
+                <a:latin typeface="微软雅黑" panose="020B0503020204020204" charset="-122"/>
+                <a:ea typeface="微软雅黑" panose="020B0503020204020204" charset="-122"/>
+              </a:rPr>
+              <a:t>APIs</a:t>
+            </a:r>
+            <a:endParaRPr lang="en-US" altLang="zh-CN" sz="2800" b="1" dirty="0">
+              <a:latin typeface="微软雅黑" panose="020B0503020204020204" charset="-122"/>
+              <a:ea typeface="微软雅黑" panose="020B0503020204020204" charset="-122"/>
+            </a:endParaRPr>
+          </a:p>
+        </p:txBody>
+      </p:sp>
+      <p:pic>
+        <p:nvPicPr>
+          <p:cNvPr id="30" name="图片 29"/>
+          <p:cNvPicPr>
+            <a:picLocks noChangeAspect="1"/>
+          </p:cNvPicPr>
+          <p:nvPr/>
+        </p:nvPicPr>
+        <p:blipFill>
+          <a:blip r:embed="rId1"/>
+          <a:stretch>
+            <a:fillRect/>
+          </a:stretch>
+        </p:blipFill>
+        <p:spPr>
+          <a:xfrm>
+            <a:off x="6969125" y="2363470"/>
+            <a:ext cx="5181600" cy="2477135"/>
+          </a:xfrm>
+          <a:prstGeom prst="rect">
+            <a:avLst/>
+          </a:prstGeom>
+        </p:spPr>
+      </p:pic>
+      <p:pic>
+        <p:nvPicPr>
+          <p:cNvPr id="29" name="图片 28"/>
+          <p:cNvPicPr>
+            <a:picLocks noChangeAspect="1"/>
+          </p:cNvPicPr>
+          <p:nvPr/>
+        </p:nvPicPr>
+        <p:blipFill>
+          <a:blip r:embed="rId2"/>
+          <a:srcRect r="18944"/>
+          <a:stretch>
+            <a:fillRect/>
+          </a:stretch>
+        </p:blipFill>
+        <p:spPr>
+          <a:xfrm>
+            <a:off x="2416175" y="1149985"/>
+            <a:ext cx="4374515" cy="1751330"/>
+          </a:xfrm>
+          <a:prstGeom prst="rect">
+            <a:avLst/>
+          </a:prstGeom>
+        </p:spPr>
+      </p:pic>
+      <p:pic>
+        <p:nvPicPr>
+          <p:cNvPr id="31" name="图片 30"/>
+          <p:cNvPicPr>
+            <a:picLocks noChangeAspect="1"/>
+          </p:cNvPicPr>
+          <p:nvPr/>
+        </p:nvPicPr>
+        <p:blipFill>
+          <a:blip r:embed="rId3"/>
+          <a:srcRect l="2220" r="3839"/>
+          <a:stretch>
+            <a:fillRect/>
+          </a:stretch>
+        </p:blipFill>
+        <p:spPr>
+          <a:xfrm>
+            <a:off x="2458085" y="4688840"/>
+            <a:ext cx="4552950" cy="1298575"/>
+          </a:xfrm>
+          <a:prstGeom prst="rect">
+            <a:avLst/>
+          </a:prstGeom>
+        </p:spPr>
+      </p:pic>
+      <p:pic>
+        <p:nvPicPr>
+          <p:cNvPr id="32" name="图片 31"/>
+          <p:cNvPicPr>
+            <a:picLocks noChangeAspect="1"/>
+          </p:cNvPicPr>
+          <p:nvPr/>
+        </p:nvPicPr>
+        <p:blipFill>
+          <a:blip r:embed="rId4"/>
+          <a:srcRect r="5066"/>
+          <a:stretch>
+            <a:fillRect/>
+          </a:stretch>
+        </p:blipFill>
+        <p:spPr>
+          <a:xfrm>
+            <a:off x="2458085" y="3038475"/>
+            <a:ext cx="4511040" cy="1400810"/>
+          </a:xfrm>
+          <a:prstGeom prst="rect">
+            <a:avLst/>
+          </a:prstGeom>
+        </p:spPr>
+      </p:pic>
+    </p:spTree>
+    <p:custDataLst>
+      <p:tags r:id="rId5"/>
+    </p:custDataLst>
+  </p:cSld>
+  <p:clrMapOvr>
+    <a:masterClrMapping/>
+  </p:clrMapOvr>
+  <mc:AlternateContent xmlns:mc="http://schemas.openxmlformats.org/markup-compatibility/2006" xmlns:p159="http://schemas.microsoft.com/office/powerpoint/2015/09/main">
+    <mc:Choice Requires="p159">
+      <p:transition xmlns:p14="http://schemas.microsoft.com/office/powerpoint/2010/main" spd="slow" p14:dur="2000">
+        <p159:morph option="byObject"/>
+      </p:transition>
+    </mc:Choice>
+    <mc:Fallback>
+      <p:transition spd="slow">
+        <p:fade/>
+      </p:transition>
+    </mc:Fallback>
+  </mc:AlternateContent>
+</p:sld>
+</file>
+
+<file path=ppt/slides/slide15.xml><?xml version="1.0" encoding="utf-8"?>
+<p:sld xmlns:a="http://schemas.openxmlformats.org/drawingml/2006/main" xmlns:r="http://schemas.openxmlformats.org/officeDocument/2006/relationships" xmlns:p="http://schemas.openxmlformats.org/presentationml/2006/main">
+  <p:cSld>
+    <p:spTree>
+      <p:nvGrpSpPr>
+        <p:cNvPr id="1" name=""/>
+        <p:cNvGrpSpPr/>
+        <p:nvPr/>
+      </p:nvGrpSpPr>
+      <p:grpSpPr>
+        <a:xfrm>
+          <a:off x="0" y="0"/>
+          <a:ext cx="0" cy="0"/>
+          <a:chOff x="0" y="0"/>
+          <a:chExt cx="0" cy="0"/>
+        </a:xfrm>
+      </p:grpSpPr>
+      <p:sp>
+        <p:nvSpPr>
           <p:cNvPr id="4" name="流程图: 手动输入 3"/>
           <p:cNvSpPr/>
           <p:nvPr/>
@@ -12858,7 +13426,7 @@
 </p:sld>
 </file>
 
-<file path=ppt/slides/slide15.xml><?xml version="1.0" encoding="utf-8"?>
+<file path=ppt/slides/slide16.xml><?xml version="1.0" encoding="utf-8"?>
 <p:sld xmlns:a="http://schemas.openxmlformats.org/drawingml/2006/main" xmlns:r="http://schemas.openxmlformats.org/officeDocument/2006/relationships" xmlns:p="http://schemas.openxmlformats.org/presentationml/2006/main">
   <p:cSld>
     <p:spTree>
@@ -13708,7 +14276,7 @@
 </p:sld>
 </file>
 
-<file path=ppt/slides/slide16.xml><?xml version="1.0" encoding="utf-8"?>
+<file path=ppt/slides/slide17.xml><?xml version="1.0" encoding="utf-8"?>
 <p:sld xmlns:a="http://schemas.openxmlformats.org/drawingml/2006/main" xmlns:r="http://schemas.openxmlformats.org/officeDocument/2006/relationships" xmlns:p="http://schemas.openxmlformats.org/presentationml/2006/main">
   <p:cSld>
     <p:spTree>
@@ -14539,7 +15107,412 @@
 </p:sld>
 </file>
 
-<file path=ppt/slides/slide17.xml><?xml version="1.0" encoding="utf-8"?>
+<file path=ppt/slides/slide18.xml><?xml version="1.0" encoding="utf-8"?>
+<p:sld xmlns:a="http://schemas.openxmlformats.org/drawingml/2006/main" xmlns:r="http://schemas.openxmlformats.org/officeDocument/2006/relationships" xmlns:p="http://schemas.openxmlformats.org/presentationml/2006/main">
+  <p:cSld>
+    <p:spTree>
+      <p:nvGrpSpPr>
+        <p:cNvPr id="1" name=""/>
+        <p:cNvGrpSpPr/>
+        <p:nvPr/>
+      </p:nvGrpSpPr>
+      <p:grpSpPr>
+        <a:xfrm>
+          <a:off x="0" y="0"/>
+          <a:ext cx="0" cy="0"/>
+          <a:chOff x="0" y="0"/>
+          <a:chExt cx="0" cy="0"/>
+        </a:xfrm>
+      </p:grpSpPr>
+      <p:sp>
+        <p:nvSpPr>
+          <p:cNvPr id="127" name="文本框 126"/>
+          <p:cNvSpPr txBox="1"/>
+          <p:nvPr/>
+        </p:nvSpPr>
+        <p:spPr>
+          <a:xfrm>
+            <a:off x="2858770" y="303030"/>
+            <a:ext cx="3035300" cy="521970"/>
+          </a:xfrm>
+          <a:prstGeom prst="rect">
+            <a:avLst/>
+          </a:prstGeom>
+          <a:noFill/>
+        </p:spPr>
+        <p:txBody>
+          <a:bodyPr wrap="none" rtlCol="0">
+            <a:spAutoFit/>
+          </a:bodyPr>
+          <a:lstStyle/>
+          <a:p>
+            <a:pPr algn="l"/>
+            <a:r>
+              <a:rPr lang="en-US" altLang="zh-CN" sz="2800" b="1" dirty="0">
+                <a:solidFill>
+                  <a:schemeClr val="tx1">
+                    <a:lumMod val="95000"/>
+                    <a:lumOff val="5000"/>
+                  </a:schemeClr>
+                </a:solidFill>
+                <a:latin typeface="微软雅黑" panose="020B0503020204020204" charset="-122"/>
+                <a:ea typeface="微软雅黑" panose="020B0503020204020204" charset="-122"/>
+                <a:sym typeface="+mn-ea"/>
+              </a:rPr>
+              <a:t>Commit History</a:t>
+            </a:r>
+            <a:endParaRPr lang="en-US" altLang="zh-CN" sz="2800" b="1" dirty="0">
+              <a:solidFill>
+                <a:schemeClr val="tx1">
+                  <a:lumMod val="95000"/>
+                  <a:lumOff val="5000"/>
+                </a:schemeClr>
+              </a:solidFill>
+              <a:latin typeface="微软雅黑" panose="020B0503020204020204" charset="-122"/>
+              <a:ea typeface="微软雅黑" panose="020B0503020204020204" charset="-122"/>
+              <a:sym typeface="+mn-ea"/>
+            </a:endParaRPr>
+          </a:p>
+        </p:txBody>
+      </p:sp>
+      <p:sp>
+        <p:nvSpPr>
+          <p:cNvPr id="11" name="矩形 10"/>
+          <p:cNvSpPr/>
+          <p:nvPr/>
+        </p:nvSpPr>
+        <p:spPr>
+          <a:xfrm>
+            <a:off x="-1" y="5215421"/>
+            <a:ext cx="2234877" cy="616282"/>
+          </a:xfrm>
+          <a:prstGeom prst="rect">
+            <a:avLst/>
+          </a:prstGeom>
+          <a:ln>
+            <a:noFill/>
+          </a:ln>
+        </p:spPr>
+        <p:style>
+          <a:lnRef idx="2">
+            <a:schemeClr val="accent1">
+              <a:shade val="15000"/>
+            </a:schemeClr>
+          </a:lnRef>
+          <a:fillRef idx="1">
+            <a:schemeClr val="accent1"/>
+          </a:fillRef>
+          <a:effectRef idx="0">
+            <a:schemeClr val="accent1"/>
+          </a:effectRef>
+          <a:fontRef idx="minor">
+            <a:schemeClr val="lt1"/>
+          </a:fontRef>
+        </p:style>
+        <p:txBody>
+          <a:bodyPr rtlCol="0" anchor="ctr"/>
+          <a:lstStyle/>
+          <a:p>
+            <a:pPr algn="ctr"/>
+            <a:endParaRPr lang="zh-CN" altLang="en-US"/>
+          </a:p>
+        </p:txBody>
+      </p:sp>
+      <p:sp>
+        <p:nvSpPr>
+          <p:cNvPr id="175" name="文本框 174"/>
+          <p:cNvSpPr txBox="1"/>
+          <p:nvPr/>
+        </p:nvSpPr>
+        <p:spPr>
+          <a:xfrm>
+            <a:off x="406555" y="3038556"/>
+            <a:ext cx="1421765" cy="398780"/>
+          </a:xfrm>
+          <a:prstGeom prst="rect">
+            <a:avLst/>
+          </a:prstGeom>
+          <a:noFill/>
+        </p:spPr>
+        <p:txBody>
+          <a:bodyPr wrap="none" rtlCol="0">
+            <a:spAutoFit/>
+          </a:bodyPr>
+          <a:lstStyle/>
+          <a:p>
+            <a:pPr algn="ctr"/>
+            <a:r>
+              <a:rPr lang="en-US" altLang="zh-CN" sz="2000" b="1" dirty="0">
+                <a:solidFill>
+                  <a:schemeClr val="bg1">
+                    <a:lumMod val="65000"/>
+                  </a:schemeClr>
+                </a:solidFill>
+                <a:latin typeface="+mj-ea"/>
+                <a:ea typeface="+mj-ea"/>
+              </a:rPr>
+              <a:t>Functions</a:t>
+            </a:r>
+            <a:endParaRPr lang="en-US" altLang="zh-CN" sz="2000" b="1" dirty="0">
+              <a:solidFill>
+                <a:schemeClr val="bg1">
+                  <a:lumMod val="65000"/>
+                </a:schemeClr>
+              </a:solidFill>
+              <a:latin typeface="+mj-ea"/>
+              <a:ea typeface="+mj-ea"/>
+            </a:endParaRPr>
+          </a:p>
+        </p:txBody>
+      </p:sp>
+      <p:sp>
+        <p:nvSpPr>
+          <p:cNvPr id="181" name="文本框 180"/>
+          <p:cNvSpPr txBox="1"/>
+          <p:nvPr/>
+        </p:nvSpPr>
+        <p:spPr>
+          <a:xfrm>
+            <a:off x="361152" y="4181335"/>
+            <a:ext cx="1512570" cy="398780"/>
+          </a:xfrm>
+          <a:prstGeom prst="rect">
+            <a:avLst/>
+          </a:prstGeom>
+          <a:noFill/>
+        </p:spPr>
+        <p:txBody>
+          <a:bodyPr wrap="none" rtlCol="0">
+            <a:spAutoFit/>
+          </a:bodyPr>
+          <a:lstStyle/>
+          <a:p>
+            <a:pPr algn="ctr"/>
+            <a:r>
+              <a:rPr lang="en-US" altLang="zh-CN" sz="2000" b="1" dirty="0">
+                <a:solidFill>
+                  <a:schemeClr val="bg1">
+                    <a:lumMod val="65000"/>
+                  </a:schemeClr>
+                </a:solidFill>
+                <a:latin typeface="+mj-ea"/>
+                <a:ea typeface="+mj-ea"/>
+                <a:sym typeface="+mn-ea"/>
+              </a:rPr>
+              <a:t>Highlights</a:t>
+            </a:r>
+            <a:endParaRPr lang="en-US" altLang="zh-CN" sz="2000" b="1" dirty="0">
+              <a:solidFill>
+                <a:schemeClr val="bg1">
+                  <a:lumMod val="65000"/>
+                </a:schemeClr>
+              </a:solidFill>
+              <a:latin typeface="+mj-ea"/>
+              <a:ea typeface="+mj-ea"/>
+              <a:sym typeface="+mn-ea"/>
+            </a:endParaRPr>
+          </a:p>
+        </p:txBody>
+      </p:sp>
+      <p:sp>
+        <p:nvSpPr>
+          <p:cNvPr id="187" name="文本框 186"/>
+          <p:cNvSpPr txBox="1"/>
+          <p:nvPr/>
+        </p:nvSpPr>
+        <p:spPr>
+          <a:xfrm>
+            <a:off x="129377" y="5324113"/>
+            <a:ext cx="1976120" cy="398780"/>
+          </a:xfrm>
+          <a:prstGeom prst="rect">
+            <a:avLst/>
+          </a:prstGeom>
+          <a:noFill/>
+        </p:spPr>
+        <p:txBody>
+          <a:bodyPr wrap="none" rtlCol="0">
+            <a:spAutoFit/>
+          </a:bodyPr>
+          <a:lstStyle/>
+          <a:p>
+            <a:pPr algn="ctr"/>
+            <a:r>
+              <a:rPr lang="en-US" altLang="zh-CN" sz="2000" b="1" dirty="0">
+                <a:solidFill>
+                  <a:schemeClr val="bg1">
+                    <a:lumMod val="95000"/>
+                  </a:schemeClr>
+                </a:solidFill>
+                <a:latin typeface="+mj-ea"/>
+                <a:ea typeface="+mj-ea"/>
+                <a:sym typeface="+mn-ea"/>
+              </a:rPr>
+              <a:t>Achievements</a:t>
+            </a:r>
+            <a:endParaRPr lang="en-US" altLang="zh-CN" sz="2000" b="1" dirty="0">
+              <a:solidFill>
+                <a:schemeClr val="bg1">
+                  <a:lumMod val="95000"/>
+                </a:schemeClr>
+              </a:solidFill>
+              <a:latin typeface="+mj-ea"/>
+              <a:ea typeface="+mj-ea"/>
+              <a:sym typeface="+mn-ea"/>
+            </a:endParaRPr>
+          </a:p>
+        </p:txBody>
+      </p:sp>
+      <p:sp>
+        <p:nvSpPr>
+          <p:cNvPr id="123" name="文本框 122"/>
+          <p:cNvSpPr txBox="1"/>
+          <p:nvPr/>
+        </p:nvSpPr>
+        <p:spPr>
+          <a:xfrm>
+            <a:off x="223357" y="1895777"/>
+            <a:ext cx="1788160" cy="398780"/>
+          </a:xfrm>
+          <a:prstGeom prst="rect">
+            <a:avLst/>
+          </a:prstGeom>
+          <a:noFill/>
+        </p:spPr>
+        <p:txBody>
+          <a:bodyPr wrap="none" rtlCol="0">
+            <a:spAutoFit/>
+          </a:bodyPr>
+          <a:lstStyle/>
+          <a:p>
+            <a:pPr algn="ctr"/>
+            <a:r>
+              <a:rPr lang="en-US" altLang="zh-CN" sz="2000" b="1" dirty="0">
+                <a:solidFill>
+                  <a:schemeClr val="bg1">
+                    <a:lumMod val="65000"/>
+                  </a:schemeClr>
+                </a:solidFill>
+                <a:latin typeface="+mj-ea"/>
+                <a:ea typeface="+mj-ea"/>
+              </a:rPr>
+              <a:t>Introduction</a:t>
+            </a:r>
+            <a:endParaRPr lang="en-US" altLang="zh-CN" sz="2000" b="1" dirty="0">
+              <a:solidFill>
+                <a:schemeClr val="bg1">
+                  <a:lumMod val="65000"/>
+                </a:schemeClr>
+              </a:solidFill>
+              <a:latin typeface="+mj-ea"/>
+              <a:ea typeface="+mj-ea"/>
+            </a:endParaRPr>
+          </a:p>
+        </p:txBody>
+      </p:sp>
+      <p:pic>
+        <p:nvPicPr>
+          <p:cNvPr id="3" name="图片 2"/>
+          <p:cNvPicPr>
+            <a:picLocks noChangeAspect="1"/>
+          </p:cNvPicPr>
+          <p:nvPr/>
+        </p:nvPicPr>
+        <p:blipFill>
+          <a:blip r:embed="rId1"/>
+          <a:srcRect t="1539" b="1933"/>
+          <a:stretch>
+            <a:fillRect/>
+          </a:stretch>
+        </p:blipFill>
+        <p:spPr>
+          <a:xfrm>
+            <a:off x="2522855" y="824865"/>
+            <a:ext cx="7621270" cy="5771515"/>
+          </a:xfrm>
+          <a:prstGeom prst="rect">
+            <a:avLst/>
+          </a:prstGeom>
+        </p:spPr>
+      </p:pic>
+      <p:sp>
+        <p:nvSpPr>
+          <p:cNvPr id="4" name="矩形 3"/>
+          <p:cNvSpPr/>
+          <p:nvPr/>
+        </p:nvSpPr>
+        <p:spPr>
+          <a:xfrm>
+            <a:off x="5890895" y="1678305"/>
+            <a:ext cx="1918970" cy="360045"/>
+          </a:xfrm>
+          <a:prstGeom prst="rect">
+            <a:avLst/>
+          </a:prstGeom>
+          <a:noFill/>
+          <a:ln>
+            <a:solidFill>
+              <a:srgbClr val="FF0000"/>
+            </a:solidFill>
+          </a:ln>
+          <a:extLst>
+            <a:ext uri="{909E8E84-426E-40DD-AFC4-6F175D3DCCD1}">
+              <a14:hiddenFill xmlns:a14="http://schemas.microsoft.com/office/drawing/2010/main">
+                <a:solidFill>
+                  <a:schemeClr val="accent1"/>
+                </a:solidFill>
+              </a14:hiddenFill>
+            </a:ext>
+          </a:extLst>
+        </p:spPr>
+        <p:style>
+          <a:lnRef idx="2">
+            <a:schemeClr val="accent1">
+              <a:shade val="15000"/>
+            </a:schemeClr>
+          </a:lnRef>
+          <a:fillRef idx="1">
+            <a:schemeClr val="accent1"/>
+          </a:fillRef>
+          <a:effectRef idx="0">
+            <a:schemeClr val="accent1"/>
+          </a:effectRef>
+          <a:fontRef idx="minor">
+            <a:schemeClr val="lt1"/>
+          </a:fontRef>
+        </p:style>
+        <p:txBody>
+          <a:bodyPr rtlCol="0" anchor="ctr"/>
+          <a:p>
+            <a:pPr algn="ctr"/>
+            <a:endParaRPr lang="zh-CN" altLang="en-US"/>
+          </a:p>
+        </p:txBody>
+      </p:sp>
+    </p:spTree>
+    <p:custDataLst>
+      <p:tags r:id="rId2"/>
+    </p:custDataLst>
+  </p:cSld>
+  <p:clrMapOvr>
+    <a:masterClrMapping/>
+  </p:clrMapOvr>
+  <mc:AlternateContent xmlns:mc="http://schemas.openxmlformats.org/markup-compatibility/2006" xmlns:p159="http://schemas.microsoft.com/office/powerpoint/2015/09/main">
+    <mc:Choice Requires="p159">
+      <p:transition xmlns:p14="http://schemas.microsoft.com/office/powerpoint/2010/main" spd="slow" p14:dur="2000">
+        <p159:morph option="byObject"/>
+      </p:transition>
+    </mc:Choice>
+    <mc:Fallback>
+      <p:transition spd="slow">
+        <p:fade/>
+      </p:transition>
+    </mc:Fallback>
+  </mc:AlternateContent>
+</p:sld>
+</file>
+
+<file path=ppt/slides/slide19.xml><?xml version="1.0" encoding="utf-8"?>
 <p:sld xmlns:a="http://schemas.openxmlformats.org/drawingml/2006/main" xmlns:r="http://schemas.openxmlformats.org/officeDocument/2006/relationships" xmlns:p="http://schemas.openxmlformats.org/presentationml/2006/main">
   <p:cSld>
     <p:spTree>
@@ -21893,19 +22866,19 @@
 
 <file path=ppt/tags/tag67.xml><?xml version="1.0" encoding="utf-8"?>
 <p:tagLst xmlns:p="http://schemas.openxmlformats.org/presentationml/2006/main">
-  <p:tag name="KSO_WM_DIAGRAM_VIRTUALLY_FRAME" val="{&quot;height&quot;:362.1,&quot;left&quot;:673.2408661417321,&quot;top&quot;:46.910393700787424,&quot;width&quot;:274.7591338582679}"/>
+  <p:tag name="ISLIDE.ICON" val="#379828;"/>
 </p:tagLst>
 </file>
 
 <file path=ppt/tags/tag68.xml><?xml version="1.0" encoding="utf-8"?>
 <p:tagLst xmlns:p="http://schemas.openxmlformats.org/presentationml/2006/main">
-  <p:tag name="ISLIDE.ICON" val="#379828;"/>
+  <p:tag name="KSO_WM_DIAGRAM_VIRTUALLY_FRAME" val="{&quot;height&quot;:362.1,&quot;left&quot;:673.2408661417321,&quot;top&quot;:46.910393700787424,&quot;width&quot;:274.7591338582679}"/>
 </p:tagLst>
 </file>
 
 <file path=ppt/tags/tag69.xml><?xml version="1.0" encoding="utf-8"?>
 <p:tagLst xmlns:p="http://schemas.openxmlformats.org/presentationml/2006/main">
-  <p:tag name="KSO_WM_DIAGRAM_VIRTUALLY_FRAME" val="{&quot;height&quot;:378.05,&quot;left&quot;:424.21740157480315,&quot;top&quot;:85.73944881889763,&quot;width&quot;:565.2580314960632}"/>
+  <p:tag name="ISLIDE.ICON" val="#379828;"/>
 </p:tagLst>
 </file>
 
@@ -21989,25 +22962,38 @@
 
 <file path=ppt/tags/tag81.xml><?xml version="1.0" encoding="utf-8"?>
 <p:tagLst xmlns:p="http://schemas.openxmlformats.org/presentationml/2006/main">
-  <p:tag name="ISLIDE.ICON" val="#379828;"/>
+  <p:tag name="KSO_WM_DIAGRAM_VIRTUALLY_FRAME" val="{&quot;height&quot;:378.05,&quot;left&quot;:424.21740157480315,&quot;top&quot;:85.73944881889763,&quot;width&quot;:565.2580314960632}"/>
 </p:tagLst>
 </file>
 
 <file path=ppt/tags/tag82.xml><?xml version="1.0" encoding="utf-8"?>
 <p:tagLst xmlns:p="http://schemas.openxmlformats.org/presentationml/2006/main">
   <p:tag name="ISLIDE.ICON" val="#379828;"/>
-  <p:tag name="resource_record_key" val="{&quot;29&quot;:[50053024]}"/>
 </p:tagLst>
 </file>
 
 <file path=ppt/tags/tag83.xml><?xml version="1.0" encoding="utf-8"?>
 <p:tagLst xmlns:p="http://schemas.openxmlformats.org/presentationml/2006/main">
   <p:tag name="ISLIDE.ICON" val="#379828;"/>
+  <p:tag name="resource_record_key" val="{&quot;29&quot;:[50053024]}"/>
+</p:tagLst>
+</file>
+
+<file path=ppt/tags/tag84.xml><?xml version="1.0" encoding="utf-8"?>
+<p:tagLst xmlns:p="http://schemas.openxmlformats.org/presentationml/2006/main">
+  <p:tag name="ISLIDE.ICON" val="#379828;"/>
+  <p:tag name="resource_record_key" val="{&quot;29&quot;:[50053024]}"/>
+</p:tagLst>
+</file>
+
+<file path=ppt/tags/tag85.xml><?xml version="1.0" encoding="utf-8"?>
+<p:tagLst xmlns:p="http://schemas.openxmlformats.org/presentationml/2006/main">
+  <p:tag name="ISLIDE.ICON" val="#379828;"/>
   <p:tag name="ISLIDE.VECTOR" val="#431516;#431587;"/>
 </p:tagLst>
 </file>
 
-<file path=ppt/tags/tag84.xml><?xml version="1.0" encoding="utf-8"?>
+<file path=ppt/tags/tag86.xml><?xml version="1.0" encoding="utf-8"?>
 <p:tagLst xmlns:p="http://schemas.openxmlformats.org/presentationml/2006/main">
   <p:tag name="commondata" val="eyJoZGlkIjoiMjRkMzNkNzdiZDJjODQ4MDU4ZTVmZjg1YjhlMDUwNGEifQ=="/>
   <p:tag name="resource_record_key" val="{&quot;29&quot;:[50053024]}"/>
